--- a/files/peer_prediction_ppt.pptx
+++ b/files/peer_prediction_ppt.pptx
@@ -1,6 +1,6 @@
 
 <file path=ppt/presentation.xml><?xml version="1.0" encoding="utf-8"?>
-<p:presentation xmlns:a="http://schemas.openxmlformats.org/drawingml/2006/main" xmlns:r="http://schemas.openxmlformats.org/officeDocument/2006/relationships" xmlns:p="http://schemas.openxmlformats.org/presentationml/2006/main" saveSubsetFonts="1" autoCompressPictures="0">
+<p:presentation xmlns:a="http://schemas.openxmlformats.org/drawingml/2006/main" xmlns:r="http://schemas.openxmlformats.org/officeDocument/2006/relationships" xmlns:p="http://schemas.openxmlformats.org/presentationml/2006/main" removePersonalInfoOnSave="1" saveSubsetFonts="1" autoCompressPictures="0">
   <p:sldMasterIdLst>
     <p:sldMasterId id="2147483858" r:id="rId1"/>
   </p:sldMasterIdLst>
@@ -121,6 +121,14 @@
 </p:presentation>
 </file>
 
+<file path=ppt/revisionInfo.xml><?xml version="1.0" encoding="utf-8"?>
+<p1510:revInfo xmlns:a="http://schemas.openxmlformats.org/drawingml/2006/main" xmlns:r="http://schemas.openxmlformats.org/officeDocument/2006/relationships" xmlns:p1510="http://schemas.microsoft.com/office/powerpoint/2015/10/main">
+  <p1510:revLst>
+    <p1510:client id="{43D4C215-95B6-4274-83BE-3BC4CC0B5E5A}" v="2" dt="2023-01-04T13:43:49.742"/>
+  </p1510:revLst>
+</p1510:revInfo>
+</file>
+
 <file path=ppt/notesMasters/notesMaster1.xml><?xml version="1.0" encoding="utf-8"?>
 <p:notesMaster xmlns:a="http://schemas.openxmlformats.org/drawingml/2006/main" xmlns:r="http://schemas.openxmlformats.org/officeDocument/2006/relationships" xmlns:p="http://schemas.openxmlformats.org/presentationml/2006/main">
   <p:cSld>
@@ -203,7 +211,7 @@
           <a:p>
             <a:fld id="{BDA51940-DB52-3B48-AABB-9C7938529E4E}" type="datetimeFigureOut">
               <a:rPr kumimoji="1" lang="zh-CN" altLang="en-US" smtClean="0"/>
-              <a:t>2022/10/12</a:t>
+              <a:t>2023/1/23</a:t>
             </a:fld>
             <a:endParaRPr kumimoji="1" lang="zh-CN" altLang="en-US"/>
           </a:p>
@@ -989,7 +997,7 @@
           <a:p>
             <a:fld id="{E4551058-E5DB-324A-A8E9-6D3BEF243C3B}" type="datetimeFigureOut">
               <a:rPr kumimoji="1" lang="zh-CN" altLang="en-US" smtClean="0"/>
-              <a:t>2022/10/12</a:t>
+              <a:t>2023/1/23</a:t>
             </a:fld>
             <a:endParaRPr kumimoji="1" lang="zh-CN" altLang="en-US"/>
           </a:p>
@@ -1353,7 +1361,7 @@
           <a:p>
             <a:fld id="{E4551058-E5DB-324A-A8E9-6D3BEF243C3B}" type="datetimeFigureOut">
               <a:rPr kumimoji="1" lang="zh-CN" altLang="en-US" smtClean="0"/>
-              <a:t>2022/10/12</a:t>
+              <a:t>2023/1/23</a:t>
             </a:fld>
             <a:endParaRPr kumimoji="1" lang="zh-CN" altLang="en-US"/>
           </a:p>
@@ -1524,7 +1532,7 @@
           <a:p>
             <a:fld id="{E4551058-E5DB-324A-A8E9-6D3BEF243C3B}" type="datetimeFigureOut">
               <a:rPr kumimoji="1" lang="zh-CN" altLang="en-US" smtClean="0"/>
-              <a:t>2022/10/12</a:t>
+              <a:t>2023/1/23</a:t>
             </a:fld>
             <a:endParaRPr kumimoji="1" lang="zh-CN" altLang="en-US"/>
           </a:p>
@@ -1801,7 +1809,7 @@
           <a:p>
             <a:fld id="{E4551058-E5DB-324A-A8E9-6D3BEF243C3B}" type="datetimeFigureOut">
               <a:rPr kumimoji="1" lang="zh-CN" altLang="en-US" smtClean="0"/>
-              <a:t>2022/10/12</a:t>
+              <a:t>2023/1/23</a:t>
             </a:fld>
             <a:endParaRPr kumimoji="1" lang="zh-CN" altLang="en-US"/>
           </a:p>
@@ -1914,7 +1922,7 @@
           <a:p>
             <a:fld id="{E4551058-E5DB-324A-A8E9-6D3BEF243C3B}" type="datetimeFigureOut">
               <a:rPr kumimoji="1" lang="zh-CN" altLang="en-US" smtClean="0"/>
-              <a:t>2022/10/12</a:t>
+              <a:t>2023/1/23</a:t>
             </a:fld>
             <a:endParaRPr kumimoji="1" lang="zh-CN" altLang="en-US"/>
           </a:p>
@@ -2211,7 +2219,7 @@
           <a:p>
             <a:fld id="{E4551058-E5DB-324A-A8E9-6D3BEF243C3B}" type="datetimeFigureOut">
               <a:rPr kumimoji="1" lang="zh-CN" altLang="en-US" smtClean="0"/>
-              <a:t>2022/10/12</a:t>
+              <a:t>2023/1/23</a:t>
             </a:fld>
             <a:endParaRPr kumimoji="1" lang="zh-CN" altLang="en-US"/>
           </a:p>
@@ -2677,7 +2685,7 @@
           <a:p>
             <a:fld id="{E4551058-E5DB-324A-A8E9-6D3BEF243C3B}" type="datetimeFigureOut">
               <a:rPr kumimoji="1" lang="zh-CN" altLang="en-US" smtClean="0"/>
-              <a:t>2022/10/12</a:t>
+              <a:t>2023/1/23</a:t>
             </a:fld>
             <a:endParaRPr kumimoji="1" lang="zh-CN" altLang="en-US"/>
           </a:p>
@@ -2957,7 +2965,7 @@
           <a:p>
             <a:fld id="{E4551058-E5DB-324A-A8E9-6D3BEF243C3B}" type="datetimeFigureOut">
               <a:rPr kumimoji="1" lang="zh-CN" altLang="en-US" smtClean="0"/>
-              <a:t>2022/10/12</a:t>
+              <a:t>2023/1/23</a:t>
             </a:fld>
             <a:endParaRPr kumimoji="1" lang="zh-CN" altLang="en-US"/>
           </a:p>
@@ -3352,7 +3360,7 @@
           <a:p>
             <a:fld id="{E4551058-E5DB-324A-A8E9-6D3BEF243C3B}" type="datetimeFigureOut">
               <a:rPr kumimoji="1" lang="zh-CN" altLang="en-US" smtClean="0"/>
-              <a:t>2022/10/12</a:t>
+              <a:t>2023/1/23</a:t>
             </a:fld>
             <a:endParaRPr kumimoji="1" lang="zh-CN" altLang="en-US"/>
           </a:p>
@@ -3475,7 +3483,7 @@
           <a:p>
             <a:fld id="{E4551058-E5DB-324A-A8E9-6D3BEF243C3B}" type="datetimeFigureOut">
               <a:rPr kumimoji="1" lang="zh-CN" altLang="en-US" smtClean="0"/>
-              <a:t>2022/10/12</a:t>
+              <a:t>2023/1/23</a:t>
             </a:fld>
             <a:endParaRPr kumimoji="1" lang="zh-CN" altLang="en-US"/>
           </a:p>
@@ -3598,7 +3606,7 @@
           <a:p>
             <a:fld id="{E4551058-E5DB-324A-A8E9-6D3BEF243C3B}" type="datetimeFigureOut">
               <a:rPr kumimoji="1" lang="zh-CN" altLang="en-US" smtClean="0"/>
-              <a:t>2022/10/12</a:t>
+              <a:t>2023/1/23</a:t>
             </a:fld>
             <a:endParaRPr kumimoji="1" lang="zh-CN" altLang="en-US"/>
           </a:p>
@@ -3875,7 +3883,7 @@
           <a:p>
             <a:fld id="{E4551058-E5DB-324A-A8E9-6D3BEF243C3B}" type="datetimeFigureOut">
               <a:rPr kumimoji="1" lang="zh-CN" altLang="en-US" smtClean="0"/>
-              <a:t>2022/10/12</a:t>
+              <a:t>2023/1/23</a:t>
             </a:fld>
             <a:endParaRPr kumimoji="1" lang="zh-CN" altLang="en-US"/>
           </a:p>
@@ -4226,7 +4234,7 @@
           <a:p>
             <a:fld id="{E4551058-E5DB-324A-A8E9-6D3BEF243C3B}" type="datetimeFigureOut">
               <a:rPr kumimoji="1" lang="zh-CN" altLang="en-US" smtClean="0"/>
-              <a:t>2022/10/12</a:t>
+              <a:t>2023/1/23</a:t>
             </a:fld>
             <a:endParaRPr kumimoji="1" lang="zh-CN" altLang="en-US"/>
           </a:p>
@@ -9032,8 +9040,8 @@
           </a:p>
         </p:txBody>
       </p:sp>
-      <mc:AlternateContent xmlns:mc="http://schemas.openxmlformats.org/markup-compatibility/2006">
-        <mc:Choice xmlns:a14="http://schemas.microsoft.com/office/drawing/2010/main" Requires="a14">
+      <mc:AlternateContent xmlns:mc="http://schemas.openxmlformats.org/markup-compatibility/2006" xmlns:a14="http://schemas.microsoft.com/office/drawing/2010/main">
+        <mc:Choice Requires="a14">
           <p:sp>
             <p:nvSpPr>
               <p:cNvPr id="7" name="Rectangle: Rounded Corners 6">
@@ -9289,7 +9297,7 @@
             </p:txBody>
           </p:sp>
         </mc:Choice>
-        <mc:Fallback>
+        <mc:Fallback xmlns="">
           <p:sp>
             <p:nvSpPr>
               <p:cNvPr id="7" name="Rectangle: Rounded Corners 6">
